--- a/create-a-project-from-remediat-20260210171110/artifacts/kickoff-deck.pptx
+++ b/create-a-project-from-remediat-20260210171110/artifacts/kickoff-deck.pptx
@@ -20,6 +20,8 @@
     <p:sldId id="858" r:id="rId11"/>
     <p:sldId id="859" r:id="rId12"/>
     <p:sldId id="554" r:id="rId13"/>
+    <p:sldId id="901" r:id="rId35"/>
+    <p:sldId id="902" r:id="rId36"/>
   </p:sldIdLst>
   <p:sldSz cx="12192000" cy="6858000"/>
   <p:notesSz cx="6858000" cy="9144000"/>
@@ -9767,6 +9769,746 @@
         <p14:creationId xmlns:p14="http://schemas.microsoft.com/office/powerpoint/2010/main" val="247990684"/>
       </p:ext>
     </p:extLst>
+  </p:cSld>
+  <p:clrMapOvr>
+    <a:masterClrMapping/>
+  </p:clrMapOvr>
+</p:sld>
+</file>
+
+<file path=ppt/slides/slide10.xml><?xml version="1.0" encoding="utf-8"?>
+<p:sld xmlns:a="http://schemas.openxmlformats.org/drawingml/2006/main" xmlns:r="http://schemas.openxmlformats.org/officeDocument/2006/relationships" xmlns:p="http://schemas.openxmlformats.org/presentationml/2006/main">
+  <p:cSld>
+    <p:spTree>
+      <p:nvGrpSpPr>
+        <p:cNvPr id="1" name=""/>
+        <p:cNvGrpSpPr/>
+        <p:nvPr/>
+      </p:nvGrpSpPr>
+      <p:grpSpPr>
+        <a:xfrm>
+          <a:off x="0" y="0"/>
+          <a:ext cx="0" cy="0"/>
+          <a:chOff x="0" y="0"/>
+          <a:chExt cx="0" cy="0"/>
+        </a:xfrm>
+      </p:grpSpPr>
+      <!-- Eyebrow title -->
+      <p:sp>
+        <p:nvSpPr>
+          <p:cNvPr id="2" name="Text Placeholder 1"/>
+          <p:cNvSpPr>
+            <a:spLocks noGrp="1"/>
+          </p:cNvSpPr>
+          <p:nvPr>
+            <p:ph type="body" sz="quarter" idx="11"/>
+          </p:nvPr>
+        </p:nvSpPr>
+        <p:spPr>
+          <a:xfrm>
+            <a:off x="536268" y="498314"/>
+            <a:ext cx="8735748" cy="246221"/>
+          </a:xfrm>
+        </p:spPr>
+        <p:txBody>
+          <a:bodyPr/>
+          <a:lstStyle/>
+          <a:p>
+            <a:r>
+              <a:rPr lang="en-US" dirty="0"/>
+              <a:t>Sheep and Goats Analysis</a:t>
+            </a:r>
+          </a:p>
+        </p:txBody>
+      </p:sp>
+      <!-- Slide Title -->
+      <p:sp>
+        <p:nvSpPr>
+          <p:cNvPr id="3" name="Text Placeholder 2"/>
+          <p:cNvSpPr>
+            <a:spLocks noGrp="1"/>
+          </p:cNvSpPr>
+          <p:nvPr>
+            <p:ph type="body" sz="quarter" idx="10"/>
+          </p:nvPr>
+        </p:nvSpPr>
+        <p:spPr>
+          <a:xfrm>
+            <a:off x="517980" y="764864"/>
+            <a:ext cx="8735748" cy="461665"/>
+          </a:xfrm>
+        </p:spPr>
+        <p:txBody>
+          <a:bodyPr/>
+          <a:lstStyle/>
+          <a:p>
+            <a:r>
+              <a:rPr lang="en-US" dirty="0"/>
+              <a:t>Meeting Summary</a:t>
+            </a:r>
+          </a:p>
+        </p:txBody>
+      </p:sp>
+      <!-- Content body with bullet points -->
+      <p:sp>
+        <p:nvSpPr>
+          <p:cNvPr id="4" name="Content Placeholder 3"/>
+          <p:cNvSpPr>
+            <a:spLocks noGrp="1"/>
+          </p:cNvSpPr>
+          <p:nvPr>
+            <p:ph idx="1"/>
+          </p:nvPr>
+        </p:nvSpPr>
+        <p:spPr>
+          <a:xfrm>
+            <a:off x="517980" y="1400000"/>
+            <a:ext cx="11000000" cy="4800000"/>
+          </a:xfrm>
+        </p:spPr>
+        <p:txBody>
+          <a:bodyPr/>
+          <a:lstStyle/>
+          <a:p>
+            <a:pPr marL="0" indent="0">
+              <a:buNone/>
+            </a:pPr>
+            <a:r>
+              <a:rPr lang="en-US" sz="1800" b="1" dirty="0">
+                <a:solidFill>
+                  <a:srgbClr val="20465F"/>
+                </a:solidFill>
+                <a:latin typeface="Roboto" panose="02000000000000000000" pitchFamily="2" charset="0"/>
+              </a:rPr>
+              <a:t>Key Differentiating Factors:</a:t>
+            </a:r>
+          </a:p>
+          <a:p>
+            <a:pPr marL="228600" indent="-228600">
+              <a:buFont typeface="Arial" panose="020B0604020202020204" pitchFamily="34" charset="0"/>
+              <a:buChar char="•"/>
+            </a:pPr>
+            <a:r>
+              <a:rPr lang="en-US" sz="1600" b="1" dirty="0">
+                <a:solidFill>
+                  <a:srgbClr val="20465F"/>
+                </a:solidFill>
+                <a:latin typeface="Roboto" panose="02000000000000000000" pitchFamily="2" charset="0"/>
+              </a:rPr>
+              <a:t>Diet: </a:t>
+            </a:r>
+            <a:r>
+              <a:rPr lang="en-US" sz="1600" dirty="0">
+                <a:solidFill>
+                  <a:srgbClr val="20465F"/>
+                </a:solidFill>
+                <a:latin typeface="Roboto" panose="02000000000000000000" pitchFamily="2" charset="0"/>
+              </a:rPr>
+              <a:t>Sheep are grazers (grass, clover); Goats are browsers (leaves, shrubs, branches)</a:t>
+            </a:r>
+          </a:p>
+          <a:p>
+            <a:pPr marL="228600" indent="-228600">
+              <a:buFont typeface="Arial" panose="020B0604020202020204" pitchFamily="34" charset="0"/>
+              <a:buChar char="•"/>
+            </a:pPr>
+            <a:r>
+              <a:rPr lang="en-US" sz="1600" b="1" dirty="0">
+                <a:solidFill>
+                  <a:srgbClr val="20465F"/>
+                </a:solidFill>
+                <a:latin typeface="Roboto" panose="02000000000000000000" pitchFamily="2" charset="0"/>
+              </a:rPr>
+              <a:t>Physical Traits: </a:t>
+            </a:r>
+            <a:r>
+              <a:rPr lang="en-US" sz="1600" dirty="0">
+                <a:solidFill>
+                  <a:srgbClr val="20465F"/>
+                </a:solidFill>
+                <a:latin typeface="Roboto" panose="02000000000000000000" pitchFamily="2" charset="0"/>
+              </a:rPr>
+              <a:t>Sheep have wool and tails hang down; Goats have hair and tails point up</a:t>
+            </a:r>
+          </a:p>
+          <a:p>
+            <a:pPr marL="228600" indent="-228600">
+              <a:buFont typeface="Arial" panose="020B0604020202020204" pitchFamily="34" charset="0"/>
+              <a:buChar char="•"/>
+            </a:pPr>
+            <a:r>
+              <a:rPr lang="en-US" sz="1600" b="1" dirty="0">
+                <a:solidFill>
+                  <a:srgbClr val="20465F"/>
+                </a:solidFill>
+                <a:latin typeface="Roboto" panose="02000000000000000000" pitchFamily="2" charset="0"/>
+              </a:rPr>
+              <a:t>Behavior: </a:t>
+            </a:r>
+            <a:r>
+              <a:rPr lang="en-US" sz="1600" dirty="0">
+                <a:solidFill>
+                  <a:srgbClr val="20465F"/>
+                </a:solidFill>
+                <a:latin typeface="Roboto" panose="02000000000000000000" pitchFamily="2" charset="0"/>
+              </a:rPr>
+              <a:t>Sheep are flock animals that follow leaders; Goats are curious explorers</a:t>
+            </a:r>
+          </a:p>
+          <a:p>
+            <a:pPr marL="228600" indent="-228600">
+              <a:buFont typeface="Arial" panose="020B0604020202020204" pitchFamily="34" charset="0"/>
+              <a:buChar char="•"/>
+            </a:pPr>
+            <a:r>
+              <a:rPr lang="en-US" sz="1600" b="1" dirty="0">
+                <a:solidFill>
+                  <a:srgbClr val="20465F"/>
+                </a:solidFill>
+                <a:latin typeface="Roboto" panose="02000000000000000000" pitchFamily="2" charset="0"/>
+              </a:rPr>
+              <a:t>Farm Purpose: </a:t>
+            </a:r>
+            <a:r>
+              <a:rPr lang="en-US" sz="1600" dirty="0">
+                <a:solidFill>
+                  <a:srgbClr val="20465F"/>
+                </a:solidFill>
+                <a:latin typeface="Roboto" panose="02000000000000000000" pitchFamily="2" charset="0"/>
+              </a:rPr>
+              <a:t>Sheep for wool/meat; Goats for milk/meat/fiber and brush management</a:t>
+            </a:r>
+          </a:p>
+          <a:p>
+            <a:pPr marL="228600" indent="-228600">
+              <a:buFont typeface="Arial" panose="020B0604020202020204" pitchFamily="34" charset="0"/>
+              <a:buChar char="•"/>
+            </a:pPr>
+            <a:r>
+              <a:rPr lang="en-US" sz="1600" b="1" dirty="0">
+                <a:solidFill>
+                  <a:srgbClr val="20465F"/>
+                </a:solidFill>
+                <a:latin typeface="Roboto" panose="02000000000000000000" pitchFamily="2" charset="0"/>
+              </a:rPr>
+              <a:t>Movement: </a:t>
+            </a:r>
+            <a:r>
+              <a:rPr lang="en-US" sz="1600" dirty="0">
+                <a:solidFill>
+                  <a:srgbClr val="20465F"/>
+                </a:solidFill>
+                <a:latin typeface="Roboto" panose="02000000000000000000" pitchFamily="2" charset="0"/>
+              </a:rPr>
+              <a:t>Sheep are steady and grounded; Goats are nimble climbers</a:t>
+            </a:r>
+          </a:p>
+          <a:p>
+            <a:pPr marL="0" indent="0">
+              <a:buNone/>
+            </a:pPr>
+            <a:endParaRPr lang="en-US" sz="1200" dirty="0"/>
+          </a:p>
+          <a:p>
+            <a:pPr marL="0" indent="0">
+              <a:buNone/>
+            </a:pPr>
+            <a:r>
+              <a:rPr lang="en-US" sz="1800" b="1" dirty="0">
+                <a:solidFill>
+                  <a:srgbClr val="20465F"/>
+                </a:solidFill>
+                <a:latin typeface="Roboto" panose="02000000000000000000" pitchFamily="2" charset="0"/>
+              </a:rPr>
+              <a:t>Key Takeaways:</a:t>
+            </a:r>
+          </a:p>
+          <a:p>
+            <a:pPr marL="228600" indent="-228600">
+              <a:buFont typeface="Arial" panose="020B0604020202020204" pitchFamily="34" charset="0"/>
+              <a:buChar char="•"/>
+            </a:pPr>
+            <a:r>
+              <a:rPr lang="en-US" sz="1600" dirty="0">
+                <a:solidFill>
+                  <a:srgbClr val="20465F"/>
+                </a:solidFill>
+                <a:latin typeface="Roboto" panose="02000000000000000000" pitchFamily="2" charset="0"/>
+              </a:rPr>
+              <a:t>Grazers vs. Browsers: fundamental difference in feeding habits</a:t>
+            </a:r>
+          </a:p>
+          <a:p>
+            <a:pPr marL="228600" indent="-228600">
+              <a:buFont typeface="Arial" panose="020B0604020202020204" pitchFamily="34" charset="0"/>
+              <a:buChar char="•"/>
+            </a:pPr>
+            <a:r>
+              <a:rPr lang="en-US" sz="1600" dirty="0">
+                <a:solidFill>
+                  <a:srgbClr val="20465F"/>
+                </a:solidFill>
+                <a:latin typeface="Roboto" panose="02000000000000000000" pitchFamily="2" charset="0"/>
+              </a:rPr>
+              <a:t>Flock vs. Explorer Mentality: sheep stick together, goats explore individually</a:t>
+            </a:r>
+          </a:p>
+          <a:p>
+            <a:pPr marL="228600" indent="-228600">
+              <a:buFont typeface="Arial" panose="020B0604020202020204" pitchFamily="34" charset="0"/>
+              <a:buChar char="•"/>
+            </a:pPr>
+            <a:r>
+              <a:rPr lang="en-US" sz="1600" dirty="0">
+                <a:solidFill>
+                  <a:srgbClr val="20465F"/>
+                </a:solidFill>
+                <a:latin typeface="Roboto" panose="02000000000000000000" pitchFamily="2" charset="0"/>
+              </a:rPr>
+              <a:t>Wool vs. Hair: common distinguishing feature of their coats</a:t>
+            </a:r>
+          </a:p>
+        </p:txBody>
+      </p:sp>
+      <!-- Orange bottom bar -->
+      <p:sp>
+        <p:nvSpPr>
+          <p:cNvPr id="5" name="Rectangle 4"/>
+          <p:cNvSpPr/>
+          <p:nvPr/>
+        </p:nvSpPr>
+        <p:spPr>
+          <a:xfrm>
+            <a:off x="0" y="6411710"/>
+            <a:ext cx="12192000" cy="446290"/>
+          </a:xfrm>
+          <a:prstGeom prst="rect">
+            <a:avLst/>
+          </a:prstGeom>
+          <a:gradFill>
+            <a:gsLst>
+              <a:gs pos="0">
+                <a:srgbClr val="F27242"/>
+              </a:gs>
+              <a:gs pos="100000">
+                <a:srgbClr val="E75D3D"/>
+              </a:gs>
+            </a:gsLst>
+            <a:lin ang="4320000" scaled="0"/>
+          </a:gradFill>
+          <a:ln>
+            <a:noFill/>
+          </a:ln>
+        </p:spPr>
+        <p:txBody>
+          <a:bodyPr rtlCol="0" anchor="ctr"/>
+          <a:lstStyle/>
+          <a:p>
+            <a:pPr algn="ctr"/>
+            <a:endParaRPr lang="en-ZA"/>
+          </a:p>
+        </p:txBody>
+      </p:sp>
+    </p:spTree>
+  </p:cSld>
+  <p:clrMapOvr>
+    <a:masterClrMapping/>
+  </p:clrMapOvr>
+</p:sld>
+</file>
+
+<file path=ppt/slides/slide11.xml><?xml version="1.0" encoding="utf-8"?>
+<p:sld xmlns:a="http://schemas.openxmlformats.org/drawingml/2006/main" xmlns:r="http://schemas.openxmlformats.org/officeDocument/2006/relationships" xmlns:p="http://schemas.openxmlformats.org/presentationml/2006/main">
+  <p:cSld>
+    <p:spTree>
+      <p:nvGrpSpPr>
+        <p:cNvPr id="1" name=""/>
+        <p:cNvGrpSpPr/>
+        <p:nvPr/>
+      </p:nvGrpSpPr>
+      <p:grpSpPr>
+        <a:xfrm>
+          <a:off x="0" y="0"/>
+          <a:ext cx="0" cy="0"/>
+          <a:chOff x="0" y="0"/>
+          <a:chExt cx="0" cy="0"/>
+        </a:xfrm>
+      </p:grpSpPr>
+      <!-- Eyebrow title -->
+      <p:sp>
+        <p:nvSpPr>
+          <p:cNvPr id="2" name="Text Placeholder 1"/>
+          <p:cNvSpPr>
+            <a:spLocks noGrp="1"/>
+          </p:cNvSpPr>
+          <p:nvPr>
+            <p:ph type="body" sz="quarter" idx="11"/>
+          </p:nvPr>
+        </p:nvSpPr>
+        <p:spPr>
+          <a:xfrm>
+            <a:off x="536268" y="498314"/>
+            <a:ext cx="8735748" cy="246221"/>
+          </a:xfrm>
+        </p:spPr>
+        <p:txBody>
+          <a:bodyPr/>
+          <a:lstStyle/>
+          <a:p>
+            <a:r>
+              <a:rPr lang="en-US" dirty="0"/>
+              <a:t>Sheep and Goats Analysis</a:t>
+            </a:r>
+          </a:p>
+        </p:txBody>
+      </p:sp>
+      <!-- Slide Title -->
+      <p:sp>
+        <p:nvSpPr>
+          <p:cNvPr id="3" name="Text Placeholder 2"/>
+          <p:cNvSpPr>
+            <a:spLocks noGrp="1"/>
+          </p:cNvSpPr>
+          <p:nvPr>
+            <p:ph type="body" sz="quarter" idx="10"/>
+          </p:nvPr>
+        </p:nvSpPr>
+        <p:spPr>
+          <a:xfrm>
+            <a:off x="517980" y="764864"/>
+            <a:ext cx="8735748" cy="461665"/>
+          </a:xfrm>
+        </p:spPr>
+        <p:txBody>
+          <a:bodyPr/>
+          <a:lstStyle/>
+          <a:p>
+            <a:r>
+              <a:rPr lang="en-US" dirty="0"/>
+              <a:t>Recommendations and Action Items</a:t>
+            </a:r>
+          </a:p>
+        </p:txBody>
+      </p:sp>
+      <!-- Content body - Two columns -->
+      <p:sp>
+        <p:nvSpPr>
+          <p:cNvPr id="4" name="Content Placeholder Left"/>
+          <p:cNvSpPr>
+            <a:spLocks noGrp="1"/>
+          </p:cNvSpPr>
+          <p:nvPr>
+            <p:ph idx="1"/>
+          </p:nvPr>
+        </p:nvSpPr>
+        <p:spPr>
+          <a:xfrm>
+            <a:off x="517980" y="1400000"/>
+            <a:ext cx="5400000" cy="4800000"/>
+          </a:xfrm>
+        </p:spPr>
+        <p:txBody>
+          <a:bodyPr/>
+          <a:lstStyle/>
+          <a:p>
+            <a:pPr marL="0" indent="0">
+              <a:buNone/>
+            </a:pPr>
+            <a:r>
+              <a:rPr lang="en-US" sz="1800" b="1" dirty="0">
+                <a:solidFill>
+                  <a:srgbClr val="F27242"/>
+                </a:solidFill>
+                <a:latin typeface="Roboto" panose="02000000000000000000" pitchFamily="2" charset="0"/>
+              </a:rPr>
+              <a:t>Agreed Recommendations</a:t>
+            </a:r>
+          </a:p>
+          <a:p>
+            <a:pPr marL="0" indent="0">
+              <a:buNone/>
+            </a:pPr>
+            <a:endParaRPr lang="en-US" sz="800" dirty="0"/>
+          </a:p>
+          <a:p>
+            <a:pPr marL="228600" indent="-228600">
+              <a:buFont typeface="Arial" panose="020B0604020202020204" pitchFamily="34" charset="0"/>
+              <a:buChar char="•"/>
+            </a:pPr>
+            <a:r>
+              <a:rPr lang="en-US" sz="1400" dirty="0">
+                <a:solidFill>
+                  <a:srgbClr val="20465F"/>
+                </a:solidFill>
+                <a:latin typeface="Roboto" panose="02000000000000000000" pitchFamily="2" charset="0"/>
+              </a:rPr>
+              <a:t>Use visual identifiers: observe tail position, coat type, and facial features</a:t>
+            </a:r>
+          </a:p>
+          <a:p>
+            <a:pPr marL="228600" indent="-228600">
+              <a:buFont typeface="Arial" panose="020B0604020202020204" pitchFamily="34" charset="0"/>
+              <a:buChar char="•"/>
+            </a:pPr>
+            <a:r>
+              <a:rPr lang="en-US" sz="1400" dirty="0">
+                <a:solidFill>
+                  <a:srgbClr val="20465F"/>
+                </a:solidFill>
+                <a:latin typeface="Roboto" panose="02000000000000000000" pitchFamily="2" charset="0"/>
+              </a:rPr>
+              <a:t>Observe behavior patterns: flock vs. exploration tendencies</a:t>
+            </a:r>
+          </a:p>
+          <a:p>
+            <a:pPr marL="228600" indent="-228600">
+              <a:buFont typeface="Arial" panose="020B0604020202020204" pitchFamily="34" charset="0"/>
+              <a:buChar char="•"/>
+            </a:pPr>
+            <a:r>
+              <a:rPr lang="en-US" sz="1400" dirty="0">
+                <a:solidFill>
+                  <a:srgbClr val="20465F"/>
+                </a:solidFill>
+                <a:latin typeface="Roboto" panose="02000000000000000000" pitchFamily="2" charset="0"/>
+              </a:rPr>
+              <a:t>Match animal to purpose: sheep for wool/calm grazing, goats for personality/browsing/milk</a:t>
+            </a:r>
+          </a:p>
+          <a:p>
+            <a:pPr marL="228600" indent="-228600">
+              <a:buFont typeface="Arial" panose="020B0604020202020204" pitchFamily="34" charset="0"/>
+              <a:buChar char="•"/>
+            </a:pPr>
+            <a:r>
+              <a:rPr lang="en-US" sz="1400" dirty="0">
+                <a:solidFill>
+                  <a:srgbClr val="20465F"/>
+                </a:solidFill>
+                <a:latin typeface="Roboto" panose="02000000000000000000" pitchFamily="2" charset="0"/>
+              </a:rPr>
+              <a:t>Ensure proper nutrition, clean water, shelter, and parasite control for both</a:t>
+            </a:r>
+          </a:p>
+          <a:p>
+            <a:pPr marL="228600" indent="-228600">
+              <a:buFont typeface="Arial" panose="020B0604020202020204" pitchFamily="34" charset="0"/>
+              <a:buChar char="•"/>
+            </a:pPr>
+            <a:r>
+              <a:rPr lang="en-US" sz="1400" dirty="0">
+                <a:solidFill>
+                  <a:srgbClr val="20465F"/>
+                </a:solidFill>
+                <a:latin typeface="Roboto" panose="02000000000000000000" pitchFamily="2" charset="0"/>
+              </a:rPr>
+              <a:t>Use goats for brush clearing; sheep for pasture maintenance</a:t>
+            </a:r>
+          </a:p>
+          <a:p>
+            <a:pPr marL="228600" indent="-228600">
+              <a:buFont typeface="Arial" panose="020B0604020202020204" pitchFamily="34" charset="0"/>
+              <a:buChar char="•"/>
+            </a:pPr>
+            <a:r>
+              <a:rPr lang="en-US" sz="1400" dirty="0">
+                <a:solidFill>
+                  <a:srgbClr val="20465F"/>
+                </a:solidFill>
+                <a:latin typeface="Roboto" panose="02000000000000000000" pitchFamily="2" charset="0"/>
+              </a:rPr>
+              <a:t>Remember: goats test fences and can open latches - secure enclosures accordingly</a:t>
+            </a:r>
+          </a:p>
+        </p:txBody>
+      </p:sp>
+      <!-- Right column - Action Items -->
+      <p:sp>
+        <p:nvSpPr>
+          <p:cNvPr id="6" name="Content Placeholder Right"/>
+          <p:cNvSpPr>
+            <a:spLocks noGrp="1"/>
+          </p:cNvSpPr>
+          <p:nvPr>
+            <p:ph idx="2"/>
+          </p:nvPr>
+        </p:nvSpPr>
+        <p:spPr>
+          <a:xfrm>
+            <a:off x="6100000" y="1400000"/>
+            <a:ext cx="5600000" cy="4800000"/>
+          </a:xfrm>
+        </p:spPr>
+        <p:txBody>
+          <a:bodyPr/>
+          <a:lstStyle/>
+          <a:p>
+            <a:pPr marL="0" indent="0">
+              <a:buNone/>
+            </a:pPr>
+            <a:r>
+              <a:rPr lang="en-US" sz="1800" b="1" dirty="0">
+                <a:solidFill>
+                  <a:srgbClr val="F27242"/>
+                </a:solidFill>
+                <a:latin typeface="Roboto" panose="02000000000000000000" pitchFamily="2" charset="0"/>
+              </a:rPr>
+              <a:t>Action Items</a:t>
+            </a:r>
+          </a:p>
+          <a:p>
+            <a:pPr marL="0" indent="0">
+              <a:buNone/>
+            </a:pPr>
+            <a:endParaRPr lang="en-US" sz="800" dirty="0"/>
+          </a:p>
+          <a:p>
+            <a:pPr marL="228600" indent="-228600">
+              <a:buFont typeface="Wingdings" panose="05000000000000000000" pitchFamily="2" charset="2"/>
+              <a:buChar char="¨"/>
+            </a:pPr>
+            <a:r>
+              <a:rPr lang="en-US" sz="1400" dirty="0">
+                <a:solidFill>
+                  <a:srgbClr val="20465F"/>
+                </a:solidFill>
+                <a:latin typeface="Roboto" panose="02000000000000000000" pitchFamily="2" charset="0"/>
+              </a:rPr>
+              <a:t>Create identification guide with visual reference charts</a:t>
+            </a:r>
+          </a:p>
+          <a:p>
+            <a:pPr marL="228600" indent="-228600">
+              <a:buFont typeface="Wingdings" panose="05000000000000000000" pitchFamily="2" charset="2"/>
+              <a:buChar char="¨"/>
+            </a:pPr>
+            <a:r>
+              <a:rPr lang="en-US" sz="1400" dirty="0">
+                <a:solidFill>
+                  <a:srgbClr val="20465F"/>
+                </a:solidFill>
+                <a:latin typeface="Roboto" panose="02000000000000000000" pitchFamily="2" charset="0"/>
+              </a:rPr>
+              <a:t>Document breed-specific exceptions to general rules</a:t>
+            </a:r>
+          </a:p>
+          <a:p>
+            <a:pPr marL="228600" indent="-228600">
+              <a:buFont typeface="Wingdings" panose="05000000000000000000" pitchFamily="2" charset="2"/>
+              <a:buChar char="¨"/>
+            </a:pPr>
+            <a:r>
+              <a:rPr lang="en-US" sz="1400" dirty="0">
+                <a:solidFill>
+                  <a:srgbClr val="20465F"/>
+                </a:solidFill>
+                <a:latin typeface="Roboto" panose="02000000000000000000" pitchFamily="2" charset="0"/>
+              </a:rPr>
+              <a:t>Develop feeding protocols based on grazer/browser needs</a:t>
+            </a:r>
+          </a:p>
+          <a:p>
+            <a:pPr marL="228600" indent="-228600">
+              <a:buFont typeface="Wingdings" panose="05000000000000000000" pitchFamily="2" charset="2"/>
+              <a:buChar char="¨"/>
+            </a:pPr>
+            <a:r>
+              <a:rPr lang="en-US" sz="1400" dirty="0">
+                <a:solidFill>
+                  <a:srgbClr val="20465F"/>
+                </a:solidFill>
+                <a:latin typeface="Roboto" panose="02000000000000000000" pitchFamily="2" charset="0"/>
+              </a:rPr>
+              <a:t>Review and upgrade fencing for goat enclosures</a:t>
+            </a:r>
+          </a:p>
+          <a:p>
+            <a:pPr marL="228600" indent="-228600">
+              <a:buFont typeface="Wingdings" panose="05000000000000000000" pitchFamily="2" charset="2"/>
+              <a:buChar char="¨"/>
+            </a:pPr>
+            <a:r>
+              <a:rPr lang="en-US" sz="1400" dirty="0">
+                <a:solidFill>
+                  <a:srgbClr val="20465F"/>
+                </a:solidFill>
+                <a:latin typeface="Roboto" panose="02000000000000000000" pitchFamily="2" charset="0"/>
+              </a:rPr>
+              <a:t>Establish parasite control schedules for both species</a:t>
+            </a:r>
+          </a:p>
+          <a:p>
+            <a:pPr marL="228600" indent="-228600">
+              <a:buFont typeface="Wingdings" panose="05000000000000000000" pitchFamily="2" charset="2"/>
+              <a:buChar char="¨"/>
+            </a:pPr>
+            <a:r>
+              <a:rPr lang="en-US" sz="1400" dirty="0">
+                <a:solidFill>
+                  <a:srgbClr val="20465F"/>
+                </a:solidFill>
+                <a:latin typeface="Roboto" panose="02000000000000000000" pitchFamily="2" charset="0"/>
+              </a:rPr>
+              <a:t>Plan brush management areas for goat deployment</a:t>
+            </a:r>
+          </a:p>
+          <a:p>
+            <a:pPr marL="228600" indent="-228600">
+              <a:buFont typeface="Wingdings" panose="05000000000000000000" pitchFamily="2" charset="2"/>
+              <a:buChar char="¨"/>
+            </a:pPr>
+            <a:r>
+              <a:rPr lang="en-US" sz="1400" dirty="0">
+                <a:solidFill>
+                  <a:srgbClr val="20465F"/>
+                </a:solidFill>
+                <a:latin typeface="Roboto" panose="02000000000000000000" pitchFamily="2" charset="0"/>
+              </a:rPr>
+              <a:t>Set up training session on animal behavior observation</a:t>
+            </a:r>
+          </a:p>
+        </p:txBody>
+      </p:sp>
+      <!-- Orange bottom bar -->
+      <p:sp>
+        <p:nvSpPr>
+          <p:cNvPr id="5" name="Rectangle 4"/>
+          <p:cNvSpPr/>
+          <p:nvPr/>
+        </p:nvSpPr>
+        <p:spPr>
+          <a:xfrm>
+            <a:off x="0" y="6411710"/>
+            <a:ext cx="12192000" cy="446290"/>
+          </a:xfrm>
+          <a:prstGeom prst="rect">
+            <a:avLst/>
+          </a:prstGeom>
+          <a:gradFill>
+            <a:gsLst>
+              <a:gs pos="0">
+                <a:srgbClr val="F27242"/>
+              </a:gs>
+              <a:gs pos="100000">
+                <a:srgbClr val="E75D3D"/>
+              </a:gs>
+            </a:gsLst>
+            <a:lin ang="4320000" scaled="0"/>
+          </a:gradFill>
+          <a:ln>
+            <a:noFill/>
+          </a:ln>
+        </p:spPr>
+        <p:txBody>
+          <a:bodyPr rtlCol="0" anchor="ctr"/>
+          <a:lstStyle/>
+          <a:p>
+            <a:pPr algn="ctr"/>
+            <a:endParaRPr lang="en-ZA"/>
+          </a:p>
+        </p:txBody>
+      </p:sp>
+    </p:spTree>
   </p:cSld>
   <p:clrMapOvr>
     <a:masterClrMapping/>

--- a/create-a-project-from-remediat-20260210171110/artifacts/kickoff-deck.pptx
+++ b/create-a-project-from-remediat-20260210171110/artifacts/kickoff-deck.pptx
@@ -22,6 +22,8 @@
     <p:sldId id="554" r:id="rId13"/>
     <p:sldId id="901" r:id="rId35"/>
     <p:sldId id="902" r:id="rId36"/>
+    <p:sldId id="903" r:id="rId37"/>
+    <p:sldId id="904" r:id="rId38"/>
   </p:sldIdLst>
   <p:sldSz cx="12192000" cy="6858000"/>
   <p:notesSz cx="6858000" cy="9144000"/>
@@ -10505,6 +10507,238 @@
           <a:p>
             <a:pPr algn="ctr"/>
             <a:endParaRPr lang="en-ZA"/>
+          </a:p>
+        </p:txBody>
+      </p:sp>
+    </p:spTree>
+  </p:cSld>
+  <p:clrMapOvr>
+    <a:masterClrMapping/>
+  </p:clrMapOvr>
+</p:sld>
+</file>
+
+<file path=ppt/slides/slide12.xml><?xml version="1.0" encoding="utf-8"?>
+<p:sld xmlns:a="http://schemas.openxmlformats.org/drawingml/2006/main" xmlns:p="http://schemas.openxmlformats.org/presentationml/2006/main" xmlns:r="http://schemas.openxmlformats.org/officeDocument/2006/relationships">
+  <p:cSld>
+    <p:spTree>
+      <p:nvGrpSpPr>
+        <p:cNvPr id="1" name=""/>
+        <p:cNvGrpSpPr/>
+        <p:nvPr/>
+      </p:nvGrpSpPr>
+      <p:grpSpPr/>
+      <p:sp>
+        <p:nvSpPr>
+          <p:cNvPr id="2" name="Text Placeholder 1"/>
+          <p:cNvSpPr>
+            <a:spLocks noGrp="1"/>
+          </p:cNvSpPr>
+          <p:nvPr>
+            <p:ph type="body" idx="11" sz="quarter"/>
+          </p:nvPr>
+        </p:nvSpPr>
+        <p:spPr/>
+        <p:txBody>
+          <a:bodyPr/>
+          <a:lstStyle/>
+          <a:p>
+            <a:r>
+              <a:t>Meeting Summary: Sheep vs. Goats</a:t>
+            </a:r>
+          </a:p>
+        </p:txBody>
+      </p:sp>
+      <p:sp>
+        <p:nvSpPr>
+          <p:cNvPr id="3" name="Text Placeholder 2"/>
+          <p:cNvSpPr>
+            <a:spLocks noGrp="1"/>
+          </p:cNvSpPr>
+          <p:nvPr>
+            <p:ph type="body" idx="12" sz="quarter"/>
+          </p:nvPr>
+        </p:nvSpPr>
+        <p:spPr/>
+        <p:txBody>
+          <a:bodyPr/>
+          <a:lstStyle/>
+          <a:p/>
+          <a:p>
+            <a:pPr>
+              <a:defRPr b="1" sz="1400"/>
+            </a:pPr>
+            <a:r>
+              <a:t>Dietary Habits</a:t>
+            </a:r>
+          </a:p>
+          <a:p>
+            <a:pPr lvl="1">
+              <a:defRPr sz="1200"/>
+            </a:pPr>
+            <a:r>
+              <a:t>Sheep are grazers; Goats are browsers (prefer higher vegetation)</a:t>
+            </a:r>
+          </a:p>
+          <a:p>
+            <a:pPr>
+              <a:defRPr b="1" sz="1400"/>
+            </a:pPr>
+            <a:r>
+              <a:t>Physical Features</a:t>
+            </a:r>
+          </a:p>
+          <a:p>
+            <a:pPr lvl="1">
+              <a:defRPr sz="1200"/>
+            </a:pPr>
+            <a:r>
+              <a:t>Sheep: wool, hanging tails; Goats: hair, upright tails, often beards</a:t>
+            </a:r>
+          </a:p>
+          <a:p>
+            <a:pPr>
+              <a:defRPr b="1" sz="1400"/>
+            </a:pPr>
+            <a:r>
+              <a:t>Behavior</a:t>
+            </a:r>
+          </a:p>
+          <a:p>
+            <a:pPr lvl="1">
+              <a:defRPr sz="1200"/>
+            </a:pPr>
+            <a:r>
+              <a:t>Sheep are flock animals; Goats are curious explorers</a:t>
+            </a:r>
+          </a:p>
+          <a:p>
+            <a:pPr>
+              <a:defRPr b="1" sz="1400"/>
+            </a:pPr>
+            <a:r>
+              <a:t>Vocalization</a:t>
+            </a:r>
+          </a:p>
+          <a:p>
+            <a:pPr lvl="1">
+              <a:defRPr sz="1200"/>
+            </a:pPr>
+            <a:r>
+              <a:t>Sheep 'baa'; Goats 'bleat' with raspier, attention-seeking sounds</a:t>
+            </a:r>
+          </a:p>
+          <a:p>
+            <a:pPr>
+              <a:defRPr b="1" sz="1400"/>
+            </a:pPr>
+            <a:r>
+              <a:t>Farm Purpose</a:t>
+            </a:r>
+          </a:p>
+          <a:p>
+            <a:pPr lvl="1">
+              <a:defRPr sz="1200"/>
+            </a:pPr>
+            <a:r>
+              <a:t>Sheep: wool, meat, milk; Goats: milk, meat, fiber, brush management</a:t>
+            </a:r>
+          </a:p>
+        </p:txBody>
+      </p:sp>
+    </p:spTree>
+  </p:cSld>
+  <p:clrMapOvr>
+    <a:masterClrMapping/>
+  </p:clrMapOvr>
+</p:sld>
+</file>
+
+<file path=ppt/slides/slide13.xml><?xml version="1.0" encoding="utf-8"?>
+<p:sld xmlns:a="http://schemas.openxmlformats.org/drawingml/2006/main" xmlns:p="http://schemas.openxmlformats.org/presentationml/2006/main" xmlns:r="http://schemas.openxmlformats.org/officeDocument/2006/relationships">
+  <p:cSld>
+    <p:spTree>
+      <p:nvGrpSpPr>
+        <p:cNvPr id="1" name=""/>
+        <p:cNvGrpSpPr/>
+        <p:nvPr/>
+      </p:nvGrpSpPr>
+      <p:grpSpPr/>
+      <p:sp>
+        <p:nvSpPr>
+          <p:cNvPr id="2" name="Text Placeholder 1"/>
+          <p:cNvSpPr>
+            <a:spLocks noGrp="1"/>
+          </p:cNvSpPr>
+          <p:nvPr>
+            <p:ph type="body" idx="11" sz="quarter"/>
+          </p:nvPr>
+        </p:nvSpPr>
+        <p:spPr/>
+        <p:txBody>
+          <a:bodyPr/>
+          <a:lstStyle/>
+          <a:p>
+            <a:r>
+              <a:t>Recommendations &amp; Action Items</a:t>
+            </a:r>
+          </a:p>
+        </p:txBody>
+      </p:sp>
+      <p:sp>
+        <p:nvSpPr>
+          <p:cNvPr id="3" name="Text Placeholder 2"/>
+          <p:cNvSpPr>
+            <a:spLocks noGrp="1"/>
+          </p:cNvSpPr>
+          <p:nvPr>
+            <p:ph type="body" idx="12" sz="quarter"/>
+          </p:nvPr>
+        </p:nvSpPr>
+        <p:spPr/>
+        <p:txBody>
+          <a:bodyPr/>
+          <a:lstStyle/>
+          <a:p/>
+          <a:p>
+            <a:pPr>
+              <a:defRPr sz="1300"/>
+            </a:pPr>
+            <a:r>
+              <a:t>Dietary Management: Provide appropriate nutrition, clean water, shelter, and parasite control</a:t>
+            </a:r>
+          </a:p>
+          <a:p>
+            <a:pPr>
+              <a:defRPr sz="1300"/>
+            </a:pPr>
+            <a:r>
+              <a:t>Behavioral Awareness: Sheep seek flock safety; goats explore and test boundaries</a:t>
+            </a:r>
+          </a:p>
+          <a:p>
+            <a:pPr>
+              <a:defRPr sz="1300"/>
+            </a:pPr>
+            <a:r>
+              <a:t>Movement Differences: Account for goats' climbing ability and sheep's preference for open spaces</a:t>
+            </a:r>
+          </a:p>
+          <a:p>
+            <a:pPr>
+              <a:defRPr sz="1300"/>
+            </a:pPr>
+            <a:r>
+              <a:t>Purpose-Driven Selection: Choose based on farm goals</a:t>
+            </a:r>
+          </a:p>
+          <a:p>
+            <a:pPr>
+              <a:defRPr sz="1300"/>
+            </a:pPr>
+            <a:r>
+              <a:t>Core Distinction: Sheep graze together; Goats browse and explore</a:t>
+            </a:r>
           </a:p>
         </p:txBody>
       </p:sp>

--- a/create-a-project-from-remediat-20260210171110/artifacts/kickoff-deck.pptx
+++ b/create-a-project-from-remediat-20260210171110/artifacts/kickoff-deck.pptx
@@ -24,6 +24,8 @@
     <p:sldId id="902" r:id="rId36"/>
     <p:sldId id="903" r:id="rId37"/>
     <p:sldId id="904" r:id="rId38"/>
+    <p:sldId id="905" r:id="rId39"/>
+    <p:sldId id="906" r:id="rId40"/>
   </p:sldIdLst>
   <p:sldSz cx="12192000" cy="6858000"/>
   <p:notesSz cx="6858000" cy="9144000"/>
@@ -10738,6 +10740,236 @@
             </a:pPr>
             <a:r>
               <a:t>Core Distinction: Sheep graze together; Goats browse and explore</a:t>
+            </a:r>
+          </a:p>
+        </p:txBody>
+      </p:sp>
+    </p:spTree>
+  </p:cSld>
+  <p:clrMapOvr>
+    <a:masterClrMapping/>
+  </p:clrMapOvr>
+</p:sld>
+</file>
+
+<file path=ppt/slides/slide14.xml><?xml version="1.0" encoding="utf-8"?>
+<p:sld xmlns:a="http://schemas.openxmlformats.org/drawingml/2006/main" xmlns:p="http://schemas.openxmlformats.org/presentationml/2006/main" xmlns:r="http://schemas.openxmlformats.org/officeDocument/2006/relationships">
+  <p:cSld>
+    <p:spTree>
+      <p:nvGrpSpPr>
+        <p:cNvPr id="1" name=""/>
+        <p:cNvGrpSpPr/>
+        <p:nvPr/>
+      </p:nvGrpSpPr>
+      <p:grpSpPr/>
+      <p:sp>
+        <p:nvSpPr>
+          <p:cNvPr id="2" name="Text Placeholder 1"/>
+          <p:cNvSpPr>
+            <a:spLocks noGrp="1"/>
+          </p:cNvSpPr>
+          <p:nvPr>
+            <p:ph type="body" idx="10" sz="quarter"/>
+          </p:nvPr>
+        </p:nvSpPr>
+        <p:spPr/>
+        <p:txBody>
+          <a:bodyPr/>
+          <a:lstStyle/>
+          <a:p/>
+        </p:txBody>
+      </p:sp>
+      <p:sp>
+        <p:nvSpPr>
+          <p:cNvPr id="3" name="Text Placeholder 2"/>
+          <p:cNvSpPr>
+            <a:spLocks noGrp="1"/>
+          </p:cNvSpPr>
+          <p:nvPr>
+            <p:ph type="body" idx="11" sz="quarter"/>
+          </p:nvPr>
+        </p:nvSpPr>
+        <p:spPr/>
+        <p:txBody>
+          <a:bodyPr/>
+          <a:lstStyle/>
+          <a:p/>
+        </p:txBody>
+      </p:sp>
+      <p:sp>
+        <p:nvSpPr>
+          <p:cNvPr id="4" name="Text Placeholder 3"/>
+          <p:cNvSpPr>
+            <a:spLocks noGrp="1"/>
+          </p:cNvSpPr>
+          <p:nvPr>
+            <p:ph type="body" idx="12" sz="quarter"/>
+          </p:nvPr>
+        </p:nvSpPr>
+        <p:spPr/>
+        <p:txBody>
+          <a:bodyPr/>
+          <a:lstStyle/>
+          <a:p>
+            <a:pPr>
+              <a:defRPr sz="1400"/>
+            </a:pPr>
+            <a:r>
+              <a:t>Conducted By: Andrey Kerchin</a:t>
+            </a:r>
+          </a:p>
+          <a:p>
+            <a:pPr>
+              <a:defRPr sz="1400"/>
+            </a:pPr>
+            <a:r>
+              <a:t>Purpose: Technical test - connection and meeting test verification</a:t>
+            </a:r>
+          </a:p>
+          <a:p>
+            <a:pPr/>
+          </a:p>
+          <a:p>
+            <a:pPr>
+              <a:defRPr sz="1400" b="1"/>
+            </a:pPr>
+            <a:r>
+              <a:t>Key Discussion Points:</a:t>
+            </a:r>
+          </a:p>
+          <a:p>
+            <a:pPr lvl="1">
+              <a:defRPr sz="1300"/>
+            </a:pPr>
+            <a:r>
+              <a:t>Audio checks performed (111, 123123 проверка связи, Раз 23 раз, 23)</a:t>
+            </a:r>
+          </a:p>
+          <a:p>
+            <a:pPr lvl="1">
+              <a:defRPr sz="1300"/>
+            </a:pPr>
+            <a:r>
+              <a:t>Meeting test confirmation (Это проверка митинга)</a:t>
+            </a:r>
+          </a:p>
+          <a:p>
+            <a:pPr lvl="1">
+              <a:defRPr sz="1300"/>
+            </a:pPr>
+            <a:r>
+              <a:t>Name mentioned: Валентика t</a:t>
+            </a:r>
+          </a:p>
+          <a:p>
+            <a:pPr lvl="1">
+              <a:defRPr sz="1300"/>
+            </a:pPr>
+            <a:r>
+              <a:t>Brief unscripted test call to verify audio and meeting functionality</a:t>
+            </a:r>
+          </a:p>
+        </p:txBody>
+      </p:sp>
+    </p:spTree>
+  </p:cSld>
+  <p:clrMapOvr>
+    <a:masterClrMapping/>
+  </p:clrMapOvr>
+</p:sld>
+</file>
+
+<file path=ppt/slides/slide15.xml><?xml version="1.0" encoding="utf-8"?>
+<p:sld xmlns:a="http://schemas.openxmlformats.org/drawingml/2006/main" xmlns:p="http://schemas.openxmlformats.org/presentationml/2006/main" xmlns:r="http://schemas.openxmlformats.org/officeDocument/2006/relationships">
+  <p:cSld>
+    <p:spTree>
+      <p:nvGrpSpPr>
+        <p:cNvPr id="1" name=""/>
+        <p:cNvGrpSpPr/>
+        <p:nvPr/>
+      </p:nvGrpSpPr>
+      <p:grpSpPr/>
+      <p:sp>
+        <p:nvSpPr>
+          <p:cNvPr id="2" name="Text Placeholder 1"/>
+          <p:cNvSpPr>
+            <a:spLocks noGrp="1"/>
+          </p:cNvSpPr>
+          <p:nvPr>
+            <p:ph type="body" idx="10" sz="quarter"/>
+          </p:nvPr>
+        </p:nvSpPr>
+        <p:spPr/>
+        <p:txBody>
+          <a:bodyPr/>
+          <a:lstStyle/>
+          <a:p/>
+        </p:txBody>
+      </p:sp>
+      <p:sp>
+        <p:nvSpPr>
+          <p:cNvPr id="3" name="Text Placeholder 2"/>
+          <p:cNvSpPr>
+            <a:spLocks noGrp="1"/>
+          </p:cNvSpPr>
+          <p:nvPr>
+            <p:ph type="body" idx="11" sz="quarter"/>
+          </p:nvPr>
+        </p:nvSpPr>
+        <p:spPr/>
+        <p:txBody>
+          <a:bodyPr/>
+          <a:lstStyle/>
+          <a:p/>
+        </p:txBody>
+      </p:sp>
+      <p:sp>
+        <p:nvSpPr>
+          <p:cNvPr id="4" name="Text Placeholder 3"/>
+          <p:cNvSpPr>
+            <a:spLocks noGrp="1"/>
+          </p:cNvSpPr>
+          <p:nvPr>
+            <p:ph type="body" idx="12" sz="quarter"/>
+          </p:nvPr>
+        </p:nvSpPr>
+        <p:spPr/>
+        <p:txBody>
+          <a:bodyPr/>
+          <a:lstStyle/>
+          <a:p>
+            <a:pPr>
+              <a:defRPr sz="1400" b="1"/>
+            </a:pPr>
+            <a:r>
+              <a:t>Agreed Recommendations:</a:t>
+            </a:r>
+          </a:p>
+          <a:p>
+            <a:pPr lvl="1">
+              <a:defRPr sz="1300"/>
+            </a:pPr>
+            <a:r>
+              <a:t>None</a:t>
+            </a:r>
+          </a:p>
+          <a:p>
+            <a:pPr/>
+          </a:p>
+          <a:p>
+            <a:pPr>
+              <a:defRPr sz="1400" b="1"/>
+            </a:pPr>
+            <a:r>
+              <a:t>Action Items:</a:t>
+            </a:r>
+          </a:p>
+          <a:p>
+            <a:pPr lvl="1">
+              <a:defRPr sz="1300"/>
+            </a:pPr>
+            <a:r>
+              <a:t>None</a:t>
             </a:r>
           </a:p>
         </p:txBody>
